--- a/docs/content/summary_stats/summary_stats_lecture.pptx
+++ b/docs/content/summary_stats/summary_stats_lecture.pptx
@@ -3365,7 +3365,7 @@
             </a:pPr>
             <a:r>
               <a:rPr/>
-              <a:t>2026-08-27</a:t>
+              <a:t>2026-09-01</a:t>
             </a:r>
           </a:p>
         </p:txBody>

--- a/docs/content/summary_stats/summary_stats_lecture.pptx
+++ b/docs/content/summary_stats/summary_stats_lecture.pptx
@@ -3365,7 +3365,7 @@
             </a:pPr>
             <a:r>
               <a:rPr/>
-              <a:t>2026-09-01</a:t>
+              <a:t>2026-09-03</a:t>
             </a:r>
           </a:p>
         </p:txBody>

--- a/docs/content/summary_stats/summary_stats_lecture.pptx
+++ b/docs/content/summary_stats/summary_stats_lecture.pptx
@@ -3365,7 +3365,7 @@
             </a:pPr>
             <a:r>
               <a:rPr/>
-              <a:t>2026-09-03</a:t>
+              <a:t>2026-09-04</a:t>
             </a:r>
           </a:p>
         </p:txBody>
